--- a/Near-Duplicate_Question_Finder DSA.pptx
+++ b/Near-Duplicate_Question_Finder DSA.pptx
@@ -298,7 +298,7 @@
           <a:p>
             <a:fld id="{45B1BC09-D557-492E-9C5D-E4CF9E078DE2}" type="datetimeFigureOut">
               <a:rPr lang="en-US" smtClean="0"/>
-              <a:t>9/11/2026</a:t>
+              <a:t>10/12/2026</a:t>
             </a:fld>
             <a:endParaRPr lang="en-US"/>
           </a:p>
@@ -501,7 +501,7 @@
           <a:p>
             <a:fld id="{45B1BC09-D557-492E-9C5D-E4CF9E078DE2}" type="datetimeFigureOut">
               <a:rPr lang="en-US" smtClean="0"/>
-              <a:t>9/11/2026</a:t>
+              <a:t>10/12/2026</a:t>
             </a:fld>
             <a:endParaRPr lang="en-US"/>
           </a:p>
@@ -704,7 +704,7 @@
           <a:p>
             <a:fld id="{45B1BC09-D557-492E-9C5D-E4CF9E078DE2}" type="datetimeFigureOut">
               <a:rPr lang="en-US" smtClean="0"/>
-              <a:t>9/11/2026</a:t>
+              <a:t>10/12/2026</a:t>
             </a:fld>
             <a:endParaRPr lang="en-US"/>
           </a:p>
@@ -907,7 +907,7 @@
           <a:p>
             <a:fld id="{45B1BC09-D557-492E-9C5D-E4CF9E078DE2}" type="datetimeFigureOut">
               <a:rPr lang="en-US" smtClean="0"/>
-              <a:t>9/11/2026</a:t>
+              <a:t>10/12/2026</a:t>
             </a:fld>
             <a:endParaRPr lang="en-US"/>
           </a:p>
@@ -1177,7 +1177,7 @@
           <a:p>
             <a:fld id="{45B1BC09-D557-492E-9C5D-E4CF9E078DE2}" type="datetimeFigureOut">
               <a:rPr lang="en-US" smtClean="0"/>
-              <a:t>9/11/2026</a:t>
+              <a:t>10/12/2026</a:t>
             </a:fld>
             <a:endParaRPr lang="en-US"/>
           </a:p>
@@ -1439,7 +1439,7 @@
           <a:p>
             <a:fld id="{45B1BC09-D557-492E-9C5D-E4CF9E078DE2}" type="datetimeFigureOut">
               <a:rPr lang="en-US" smtClean="0"/>
-              <a:t>9/11/2026</a:t>
+              <a:t>10/12/2026</a:t>
             </a:fld>
             <a:endParaRPr lang="en-US"/>
           </a:p>
@@ -1837,7 +1837,7 @@
           <a:p>
             <a:fld id="{45B1BC09-D557-492E-9C5D-E4CF9E078DE2}" type="datetimeFigureOut">
               <a:rPr lang="en-US" smtClean="0"/>
-              <a:t>9/11/2026</a:t>
+              <a:t>10/12/2026</a:t>
             </a:fld>
             <a:endParaRPr lang="en-US"/>
           </a:p>
@@ -1981,7 +1981,7 @@
           <a:p>
             <a:fld id="{45B1BC09-D557-492E-9C5D-E4CF9E078DE2}" type="datetimeFigureOut">
               <a:rPr lang="en-US" smtClean="0"/>
-              <a:t>9/11/2026</a:t>
+              <a:t>10/12/2026</a:t>
             </a:fld>
             <a:endParaRPr lang="en-US"/>
           </a:p>
@@ -2095,7 +2095,7 @@
           <a:p>
             <a:fld id="{45B1BC09-D557-492E-9C5D-E4CF9E078DE2}" type="datetimeFigureOut">
               <a:rPr lang="en-US" smtClean="0"/>
-              <a:t>9/11/2026</a:t>
+              <a:t>10/12/2026</a:t>
             </a:fld>
             <a:endParaRPr lang="en-US"/>
           </a:p>
@@ -2398,7 +2398,7 @@
           <a:p>
             <a:fld id="{45B1BC09-D557-492E-9C5D-E4CF9E078DE2}" type="datetimeFigureOut">
               <a:rPr lang="en-US" smtClean="0"/>
-              <a:t>9/11/2026</a:t>
+              <a:t>10/12/2026</a:t>
             </a:fld>
             <a:endParaRPr lang="en-US"/>
           </a:p>
@@ -2678,7 +2678,7 @@
           <a:p>
             <a:fld id="{45B1BC09-D557-492E-9C5D-E4CF9E078DE2}" type="datetimeFigureOut">
               <a:rPr lang="en-US" smtClean="0"/>
-              <a:t>9/11/2026</a:t>
+              <a:t>10/12/2026</a:t>
             </a:fld>
             <a:endParaRPr lang="en-US"/>
           </a:p>
@@ -3551,12 +3551,23 @@
                 <a:solidFill>
                   <a:srgbClr val="000000"/>
                 </a:solidFill>
+                <a:latin typeface="Times New Roman" panose="02020603050405020304" pitchFamily="18" charset="0"/>
+                <a:ea typeface="Times New Roman" panose="02020603050405020304" pitchFamily="18" charset="0"/>
+                <a:cs typeface="Gautami" panose="020B0502040204020203" pitchFamily="34" charset="0"/>
+              </a:rPr>
+              <a:t>Mrs. Ch. Anitha</a:t>
+            </a:r>
+            <a:r>
+              <a:rPr lang="en-US" sz="1500" b="1" kern="0" dirty="0">
+                <a:solidFill>
+                  <a:srgbClr val="000000"/>
+                </a:solidFill>
                 <a:effectLst/>
                 <a:latin typeface="Times New Roman" panose="02020603050405020304" pitchFamily="18" charset="0"/>
                 <a:ea typeface="Times New Roman" panose="02020603050405020304" pitchFamily="18" charset="0"/>
                 <a:cs typeface="Gautami" panose="020B0502040204020203" pitchFamily="34" charset="0"/>
               </a:rPr>
-              <a:t>[ADD GUIDE NAME], [ADD DESIGNATION &amp; DEPARTMENT]</a:t>
+              <a:t>, Assistant Professor, CS&amp;IT</a:t>
             </a:r>
             <a:endParaRPr lang="en-IN" sz="1800" kern="100" dirty="0">
               <a:effectLst/>
